--- a/docs/presentations/Trail-Crew-First-Day-Back.pptx
+++ b/docs/presentations/Trail-Crew-First-Day-Back.pptx
@@ -4885,11 +4885,11 @@
         <p:spPr>
           <a:xfrm>
             <a:off x="640080" y="1920240"/>
-            <a:ext cx="3417722" cy="2514600"/>
+            <a:ext cx="3417722" cy="2286000"/>
           </a:xfrm>
           <a:prstGeom prst="roundRect">
             <a:avLst>
-              <a:gd name="adj" fmla="val 3273"/>
+              <a:gd name="adj" fmla="val 3600"/>
             </a:avLst>
           </a:prstGeom>
           <a:solidFill>
@@ -4957,17 +4957,17 @@
         </p:nvSpPr>
         <p:spPr>
           <a:xfrm>
-            <a:off x="960120" y="2743200"/>
-            <a:ext cx="2777642" cy="1508760"/>
-          </a:xfrm>
-          <a:prstGeom prst="rect">
-            <a:avLst/>
-          </a:prstGeom>
-          <a:noFill/>
-          <a:ln/>
-        </p:spPr>
-        <p:txBody>
-          <a:bodyPr wrap="square" lIns="0" tIns="0" rIns="0" bIns="0" rtlCol="0" anchor="ctr"/>
+            <a:off x="960120" y="2724912"/>
+            <a:ext cx="2777642" cy="1371600"/>
+          </a:xfrm>
+          <a:prstGeom prst="rect">
+            <a:avLst/>
+          </a:prstGeom>
+          <a:noFill/>
+          <a:ln/>
+        </p:spPr>
+        <p:txBody>
+          <a:bodyPr wrap="square" lIns="0" tIns="0" rIns="0" bIns="0" rtlCol="0" anchor="t"/>
           <a:lstStyle/>
           <a:p>
             <a:pPr indent="0" marL="0">
@@ -5000,11 +5000,11 @@
         <p:spPr>
           <a:xfrm>
             <a:off x="4386986" y="1920240"/>
-            <a:ext cx="3417722" cy="2514600"/>
+            <a:ext cx="3417722" cy="2286000"/>
           </a:xfrm>
           <a:prstGeom prst="roundRect">
             <a:avLst>
-              <a:gd name="adj" fmla="val 3273"/>
+              <a:gd name="adj" fmla="val 3600"/>
             </a:avLst>
           </a:prstGeom>
           <a:solidFill>
@@ -5072,17 +5072,17 @@
         </p:nvSpPr>
         <p:spPr>
           <a:xfrm>
-            <a:off x="4707026" y="2743200"/>
-            <a:ext cx="2777642" cy="1508760"/>
-          </a:xfrm>
-          <a:prstGeom prst="rect">
-            <a:avLst/>
-          </a:prstGeom>
-          <a:noFill/>
-          <a:ln/>
-        </p:spPr>
-        <p:txBody>
-          <a:bodyPr wrap="square" lIns="0" tIns="0" rIns="0" bIns="0" rtlCol="0" anchor="ctr"/>
+            <a:off x="4707026" y="2724912"/>
+            <a:ext cx="2777642" cy="1371600"/>
+          </a:xfrm>
+          <a:prstGeom prst="rect">
+            <a:avLst/>
+          </a:prstGeom>
+          <a:noFill/>
+          <a:ln/>
+        </p:spPr>
+        <p:txBody>
+          <a:bodyPr wrap="square" lIns="0" tIns="0" rIns="0" bIns="0" rtlCol="0" anchor="t"/>
           <a:lstStyle/>
           <a:p>
             <a:pPr indent="0" marL="0">
@@ -5115,11 +5115,11 @@
         <p:spPr>
           <a:xfrm>
             <a:off x="8133893" y="1920240"/>
-            <a:ext cx="3417722" cy="2514600"/>
+            <a:ext cx="3417722" cy="2286000"/>
           </a:xfrm>
           <a:prstGeom prst="roundRect">
             <a:avLst>
-              <a:gd name="adj" fmla="val 3273"/>
+              <a:gd name="adj" fmla="val 3600"/>
             </a:avLst>
           </a:prstGeom>
           <a:solidFill>
@@ -5187,17 +5187,17 @@
         </p:nvSpPr>
         <p:spPr>
           <a:xfrm>
-            <a:off x="8453933" y="2743200"/>
-            <a:ext cx="2777642" cy="1508760"/>
-          </a:xfrm>
-          <a:prstGeom prst="rect">
-            <a:avLst/>
-          </a:prstGeom>
-          <a:noFill/>
-          <a:ln/>
-        </p:spPr>
-        <p:txBody>
-          <a:bodyPr wrap="square" lIns="0" tIns="0" rIns="0" bIns="0" rtlCol="0" anchor="ctr"/>
+            <a:off x="8453933" y="2724912"/>
+            <a:ext cx="2777642" cy="1371600"/>
+          </a:xfrm>
+          <a:prstGeom prst="rect">
+            <a:avLst/>
+          </a:prstGeom>
+          <a:noFill/>
+          <a:ln/>
+        </p:spPr>
+        <p:txBody>
+          <a:bodyPr wrap="square" lIns="0" tIns="0" rIns="0" bIns="0" rtlCol="0" anchor="t"/>
           <a:lstStyle/>
           <a:p>
             <a:pPr indent="0" marL="0">
@@ -5229,7 +5229,7 @@
         </p:nvSpPr>
         <p:spPr>
           <a:xfrm>
-            <a:off x="640080" y="4800600"/>
+            <a:off x="640080" y="4572000"/>
             <a:ext cx="10911535" cy="731520"/>
           </a:xfrm>
           <a:prstGeom prst="rect">
@@ -6582,8 +6582,8 @@
         </p:nvSpPr>
         <p:spPr>
           <a:xfrm>
-            <a:off x="960120" y="2450592"/>
-            <a:ext cx="4846320" cy="2834640"/>
+            <a:off x="960120" y="2395728"/>
+            <a:ext cx="4846320" cy="2880360"/>
           </a:xfrm>
           <a:prstGeom prst="rect">
             <a:avLst/>
@@ -6597,13 +6597,13 @@
           <a:p>
             <a:pPr marL="342900" indent="-342900">
               <a:spcAft>
-                <a:spcPts val="1400"/>
+                <a:spcPts val="1600"/>
               </a:spcAft>
               <a:buSzPct val="100000"/>
               <a:buChar char="•"/>
             </a:pPr>
             <a:r>
-              <a:rPr lang="en-US" sz="1500" dirty="0">
+              <a:rPr lang="en-US" sz="1600" dirty="0">
                 <a:solidFill>
                   <a:srgbClr val="1C1A19"/>
                 </a:solidFill>
@@ -6613,18 +6613,18 @@
               </a:rPr>
               <a:t>Where to type it, and what to click.</a:t>
             </a:r>
-            <a:endParaRPr lang="en-US" sz="1500" dirty="0"/>
+            <a:endParaRPr lang="en-US" sz="1600" dirty="0"/>
           </a:p>
           <a:p>
             <a:pPr marL="342900" indent="-342900">
               <a:spcAft>
-                <a:spcPts val="1400"/>
+                <a:spcPts val="1600"/>
               </a:spcAft>
               <a:buSzPct val="100000"/>
               <a:buChar char="•"/>
             </a:pPr>
             <a:r>
-              <a:rPr lang="en-US" sz="1500" dirty="0">
+              <a:rPr lang="en-US" sz="1600" dirty="0">
                 <a:solidFill>
                   <a:srgbClr val="1C1A19"/>
                 </a:solidFill>
@@ -6634,18 +6634,18 @@
               </a:rPr>
               <a:t>The difference between a component's name and its text.</a:t>
             </a:r>
-            <a:endParaRPr lang="en-US" sz="1500" dirty="0"/>
+            <a:endParaRPr lang="en-US" sz="1600" dirty="0"/>
           </a:p>
           <a:p>
             <a:pPr marL="342900" indent="-342900">
               <a:spcAft>
-                <a:spcPts val="1400"/>
+                <a:spcPts val="1600"/>
               </a:spcAft>
               <a:buSzPct val="100000"/>
               <a:buChar char="•"/>
             </a:pPr>
             <a:r>
-              <a:rPr lang="en-US" sz="1500" dirty="0">
+              <a:rPr lang="en-US" sz="1600" dirty="0">
                 <a:solidFill>
                   <a:srgbClr val="1C1A19"/>
                 </a:solidFill>
@@ -6655,18 +6655,18 @@
               </a:rPr>
               <a:t>Let Anvil write the handler. Do not type it yourself.</a:t>
             </a:r>
-            <a:endParaRPr lang="en-US" sz="1500" dirty="0"/>
+            <a:endParaRPr lang="en-US" sz="1600" dirty="0"/>
           </a:p>
           <a:p>
             <a:pPr marL="342900" indent="-342900">
               <a:spcAft>
-                <a:spcPts val="1400"/>
+                <a:spcPts val="1600"/>
               </a:spcAft>
               <a:buSzPct val="100000"/>
               <a:buChar char="•"/>
             </a:pPr>
             <a:r>
-              <a:rPr lang="en-US" sz="1500" dirty="0">
+              <a:rPr lang="en-US" sz="1600" dirty="0">
                 <a:solidFill>
                   <a:srgbClr val="1C1A19"/>
                 </a:solidFill>
@@ -6676,18 +6676,18 @@
               </a:rPr>
               <a:t>One line, then run it. Not twenty lines, then run it.</a:t>
             </a:r>
-            <a:endParaRPr lang="en-US" sz="1500" dirty="0"/>
+            <a:endParaRPr lang="en-US" sz="1600" dirty="0"/>
           </a:p>
           <a:p>
             <a:pPr marL="342900" indent="-342900">
               <a:spcAft>
-                <a:spcPts val="1400"/>
+                <a:spcPts val="1600"/>
               </a:spcAft>
               <a:buSzPct val="100000"/>
               <a:buChar char="•"/>
             </a:pPr>
             <a:r>
-              <a:rPr lang="en-US" sz="1500" dirty="0">
+              <a:rPr lang="en-US" sz="1600" dirty="0">
                 <a:solidFill>
                   <a:srgbClr val="1C1A19"/>
                 </a:solidFill>
@@ -6697,7 +6697,28 @@
               </a:rPr>
               <a:t>Anything that touches the database goes in a Server Module.</a:t>
             </a:r>
-            <a:endParaRPr lang="en-US" sz="1500" dirty="0"/>
+            <a:endParaRPr lang="en-US" sz="1600" dirty="0"/>
+          </a:p>
+          <a:p>
+            <a:pPr marL="342900" indent="-342900">
+              <a:spcAft>
+                <a:spcPts val="1600"/>
+              </a:spcAft>
+              <a:buSzPct val="100000"/>
+              <a:buChar char="•"/>
+            </a:pPr>
+            <a:r>
+              <a:rPr lang="en-US" sz="1600" dirty="0">
+                <a:solidFill>
+                  <a:srgbClr val="1C1A19"/>
+                </a:solidFill>
+                <a:latin typeface="Calibri" pitchFamily="34" charset="0"/>
+                <a:ea typeface="Calibri" pitchFamily="34" charset="-122"/>
+                <a:cs typeface="Calibri" pitchFamily="34" charset="-120"/>
+              </a:rPr>
+              <a:t>Print things out to see what is happening. print("it worked") is real debugging.</a:t>
+            </a:r>
+            <a:endParaRPr lang="en-US" sz="1600" dirty="0"/>
           </a:p>
         </p:txBody>
       </p:sp>
@@ -9343,24 +9364,24 @@
         </p:nvSpPr>
         <p:spPr>
           <a:xfrm>
-            <a:off x="640080" y="6035040"/>
-            <a:ext cx="10911535" cy="310896"/>
-          </a:xfrm>
-          <a:prstGeom prst="rect">
-            <a:avLst/>
-          </a:prstGeom>
-          <a:noFill/>
-          <a:ln/>
-        </p:spPr>
-        <p:txBody>
-          <a:bodyPr wrap="square" lIns="0" tIns="0" rIns="0" bIns="0" rtlCol="0" anchor="ctr"/>
-          <a:lstStyle/>
-          <a:p>
-            <a:pPr indent="0" marL="0">
-              <a:buNone/>
-            </a:pPr>
-            <a:r>
-              <a:rPr lang="en-US" sz="1300" b="1" dirty="0">
+            <a:off x="640080" y="6080760"/>
+            <a:ext cx="10911535" cy="329184"/>
+          </a:xfrm>
+          <a:prstGeom prst="rect">
+            <a:avLst/>
+          </a:prstGeom>
+          <a:noFill/>
+          <a:ln/>
+        </p:spPr>
+        <p:txBody>
+          <a:bodyPr wrap="square" lIns="0" tIns="0" rIns="0" bIns="0" rtlCol="0" anchor="ctr"/>
+          <a:lstStyle/>
+          <a:p>
+            <a:pPr indent="0" marL="0">
+              <a:buNone/>
+            </a:pPr>
+            <a:r>
+              <a:rPr lang="en-US" sz="1250" b="1" dirty="0">
                 <a:solidFill>
                   <a:srgbClr val="CF4420"/>
                 </a:solidFill>
@@ -9370,46 +9391,21 @@
               </a:rPr>
               <a:t>All of these live on one page:  doubleblaze.solutions/build/watch-list.html</a:t>
             </a:r>
-            <a:endParaRPr lang="en-US" sz="1300" dirty="0"/>
-          </a:p>
-        </p:txBody>
-      </p:sp>
-      <p:sp>
-        <p:nvSpPr>
-          <p:cNvPr id="22" name="Text 20"/>
-          <p:cNvSpPr txBox="1"/>
-          <p:nvPr/>
-        </p:nvSpPr>
-        <p:spPr>
-          <a:xfrm>
-            <a:off x="640080" y="6345936"/>
-            <a:ext cx="10911535" cy="310896"/>
-          </a:xfrm>
-          <a:prstGeom prst="rect">
-            <a:avLst/>
-          </a:prstGeom>
-          <a:noFill/>
-          <a:ln/>
-        </p:spPr>
-        <p:txBody>
-          <a:bodyPr wrap="square" lIns="0" tIns="0" rIns="0" bIns="0" rtlCol="0" anchor="ctr"/>
-          <a:lstStyle/>
-          <a:p>
-            <a:pPr indent="0" marL="0">
-              <a:buNone/>
-            </a:pPr>
-            <a:r>
-              <a:rPr lang="en-US" sz="1200" i="1" dirty="0">
-                <a:solidFill>
-                  <a:srgbClr val="75787B"/>
-                </a:solidFill>
-                <a:latin typeface="Calibri" pitchFamily="34" charset="0"/>
-                <a:ea typeface="Calibri" pitchFamily="34" charset="-122"/>
-                <a:cs typeface="Calibri" pitchFamily="34" charset="-120"/>
-              </a:rPr>
-              <a:t>If a link has gone, search the title, then tell your teacher and we will swap it for a better one.</a:t>
-            </a:r>
-            <a:endParaRPr lang="en-US" sz="1200" dirty="0"/>
+            <a:pPr indent="0" marL="0">
+              <a:buNone/>
+            </a:pPr>
+            <a:r>
+              <a:rPr lang="en-US" sz="1250" i="1" dirty="0">
+                <a:solidFill>
+                  <a:srgbClr val="5A5F63"/>
+                </a:solidFill>
+                <a:latin typeface="Calibri" pitchFamily="34" charset="0"/>
+                <a:ea typeface="Calibri" pitchFamily="34" charset="-122"/>
+                <a:cs typeface="Calibri" pitchFamily="34" charset="-120"/>
+              </a:rPr>
+              <a:t>     If a link has gone, search the title and tell your teacher.</a:t>
+            </a:r>
+            <a:endParaRPr lang="en-US" sz="1250" dirty="0"/>
           </a:p>
         </p:txBody>
       </p:sp>
@@ -10813,7 +10809,7 @@
         </p:nvSpPr>
         <p:spPr>
           <a:xfrm>
-            <a:off x="6278728" y="2788920"/>
+            <a:off x="640080" y="5422392"/>
             <a:ext cx="5272888" cy="548640"/>
           </a:xfrm>
           <a:prstGeom prst="roundRect">
@@ -10847,7 +10843,7 @@
         </p:nvSpPr>
         <p:spPr>
           <a:xfrm>
-            <a:off x="6534760" y="2788920"/>
+            <a:off x="896112" y="5422392"/>
             <a:ext cx="2651760" cy="548640"/>
           </a:xfrm>
           <a:prstGeom prst="rect">
@@ -10886,7 +10882,7 @@
         </p:nvSpPr>
         <p:spPr>
           <a:xfrm>
-            <a:off x="9250528" y="2788920"/>
+            <a:off x="3611880" y="5422392"/>
             <a:ext cx="2072488" cy="548640"/>
           </a:xfrm>
           <a:prstGeom prst="rect">
@@ -10925,7 +10921,7 @@
         </p:nvSpPr>
         <p:spPr>
           <a:xfrm>
-            <a:off x="6278728" y="3447288"/>
+            <a:off x="6278728" y="2788920"/>
             <a:ext cx="5272888" cy="548640"/>
           </a:xfrm>
           <a:prstGeom prst="roundRect">
@@ -10959,7 +10955,7 @@
         </p:nvSpPr>
         <p:spPr>
           <a:xfrm>
-            <a:off x="6534760" y="3447288"/>
+            <a:off x="6534760" y="2788920"/>
             <a:ext cx="2651760" cy="548640"/>
           </a:xfrm>
           <a:prstGeom prst="rect">
@@ -10998,7 +10994,7 @@
         </p:nvSpPr>
         <p:spPr>
           <a:xfrm>
-            <a:off x="9250528" y="3447288"/>
+            <a:off x="9250528" y="2788920"/>
             <a:ext cx="2072488" cy="548640"/>
           </a:xfrm>
           <a:prstGeom prst="rect">
@@ -11037,7 +11033,7 @@
         </p:nvSpPr>
         <p:spPr>
           <a:xfrm>
-            <a:off x="6278728" y="4105656"/>
+            <a:off x="6278728" y="3447288"/>
             <a:ext cx="5272888" cy="548640"/>
           </a:xfrm>
           <a:prstGeom prst="roundRect">
@@ -11071,7 +11067,7 @@
         </p:nvSpPr>
         <p:spPr>
           <a:xfrm>
-            <a:off x="6534760" y="4105656"/>
+            <a:off x="6534760" y="3447288"/>
             <a:ext cx="2651760" cy="548640"/>
           </a:xfrm>
           <a:prstGeom prst="rect">
@@ -11096,7 +11092,7 @@
                 <a:ea typeface="Calibri" pitchFamily="34" charset="-122"/>
                 <a:cs typeface="Calibri" pitchFamily="34" charset="-120"/>
               </a:rPr>
-              <a:t>First steps, and red text</a:t>
+              <a:t>First steps in Anvil</a:t>
             </a:r>
             <a:endParaRPr lang="en-US" sz="1300" dirty="0"/>
           </a:p>
@@ -11110,7 +11106,7 @@
         </p:nvSpPr>
         <p:spPr>
           <a:xfrm>
-            <a:off x="9250528" y="4105656"/>
+            <a:off x="9250528" y="3447288"/>
             <a:ext cx="2072488" cy="548640"/>
           </a:xfrm>
           <a:prstGeom prst="rect">
@@ -11149,7 +11145,7 @@
         </p:nvSpPr>
         <p:spPr>
           <a:xfrm>
-            <a:off x="6278728" y="4764024"/>
+            <a:off x="6278728" y="4105656"/>
             <a:ext cx="5272888" cy="548640"/>
           </a:xfrm>
           <a:prstGeom prst="roundRect">
@@ -11183,7 +11179,7 @@
         </p:nvSpPr>
         <p:spPr>
           <a:xfrm>
-            <a:off x="6534760" y="4764024"/>
+            <a:off x="6534760" y="4105656"/>
             <a:ext cx="2651760" cy="548640"/>
           </a:xfrm>
           <a:prstGeom prst="rect">
@@ -11208,7 +11204,7 @@
                 <a:ea typeface="Calibri" pitchFamily="34" charset="-122"/>
                 <a:cs typeface="Calibri" pitchFamily="34" charset="-120"/>
               </a:rPr>
-              <a:t>Things to watch</a:t>
+              <a:t>When Anvil shows red text</a:t>
             </a:r>
             <a:endParaRPr lang="en-US" sz="1300" dirty="0"/>
           </a:p>
@@ -11222,7 +11218,7 @@
         </p:nvSpPr>
         <p:spPr>
           <a:xfrm>
-            <a:off x="9250528" y="4764024"/>
+            <a:off x="9250528" y="4105656"/>
             <a:ext cx="2072488" cy="548640"/>
           </a:xfrm>
           <a:prstGeom prst="rect">
@@ -11247,6 +11243,118 @@
                 <a:ea typeface="Courier New" pitchFamily="34" charset="-122"/>
                 <a:cs typeface="Courier New" pitchFamily="34" charset="-120"/>
               </a:rPr>
+              <a:t>/build/errors.html</a:t>
+            </a:r>
+            <a:endParaRPr lang="en-US" sz="1050" dirty="0"/>
+          </a:p>
+        </p:txBody>
+      </p:sp>
+      <p:sp>
+        <p:nvSpPr>
+          <p:cNvPr id="30" name="Shape 28"/>
+          <p:cNvSpPr/>
+          <p:nvPr/>
+        </p:nvSpPr>
+        <p:spPr>
+          <a:xfrm>
+            <a:off x="6278728" y="4764024"/>
+            <a:ext cx="5272888" cy="548640"/>
+          </a:xfrm>
+          <a:prstGeom prst="roundRect">
+            <a:avLst>
+              <a:gd name="adj" fmla="val 15000"/>
+            </a:avLst>
+          </a:prstGeom>
+          <a:solidFill>
+            <a:srgbClr val="FFFFFF"/>
+          </a:solidFill>
+          <a:ln w="12700">
+            <a:solidFill>
+              <a:srgbClr val="E4DED6"/>
+            </a:solidFill>
+            <a:prstDash val="solid"/>
+          </a:ln>
+          <a:effectLst>
+            <a:outerShdw sx="100000" sy="100000" kx="0" ky="0" algn="bl" rotWithShape="0" blurRad="101600" dist="12700" dir="5400000">
+              <a:srgbClr val="000000">
+                <a:alpha val="8000"/>
+              </a:srgbClr>
+            </a:outerShdw>
+          </a:effectLst>
+        </p:spPr>
+      </p:sp>
+      <p:sp>
+        <p:nvSpPr>
+          <p:cNvPr id="31" name="Text 29"/>
+          <p:cNvSpPr txBox="1"/>
+          <p:nvPr/>
+        </p:nvSpPr>
+        <p:spPr>
+          <a:xfrm>
+            <a:off x="6534760" y="4764024"/>
+            <a:ext cx="2651760" cy="548640"/>
+          </a:xfrm>
+          <a:prstGeom prst="rect">
+            <a:avLst/>
+          </a:prstGeom>
+          <a:noFill/>
+          <a:ln/>
+        </p:spPr>
+        <p:txBody>
+          <a:bodyPr wrap="square" lIns="0" tIns="0" rIns="0" bIns="0" rtlCol="0" anchor="ctr"/>
+          <a:lstStyle/>
+          <a:p>
+            <a:pPr indent="0" marL="0">
+              <a:buNone/>
+            </a:pPr>
+            <a:r>
+              <a:rPr lang="en-US" sz="1300" b="1" dirty="0">
+                <a:solidFill>
+                  <a:srgbClr val="1C1A19"/>
+                </a:solidFill>
+                <a:latin typeface="Calibri" pitchFamily="34" charset="0"/>
+                <a:ea typeface="Calibri" pitchFamily="34" charset="-122"/>
+                <a:cs typeface="Calibri" pitchFamily="34" charset="-120"/>
+              </a:rPr>
+              <a:t>Things to watch</a:t>
+            </a:r>
+            <a:endParaRPr lang="en-US" sz="1300" dirty="0"/>
+          </a:p>
+        </p:txBody>
+      </p:sp>
+      <p:sp>
+        <p:nvSpPr>
+          <p:cNvPr id="32" name="Text 30"/>
+          <p:cNvSpPr txBox="1"/>
+          <p:nvPr/>
+        </p:nvSpPr>
+        <p:spPr>
+          <a:xfrm>
+            <a:off x="9250528" y="4764024"/>
+            <a:ext cx="2072488" cy="548640"/>
+          </a:xfrm>
+          <a:prstGeom prst="rect">
+            <a:avLst/>
+          </a:prstGeom>
+          <a:noFill/>
+          <a:ln/>
+        </p:spPr>
+        <p:txBody>
+          <a:bodyPr wrap="square" lIns="0" tIns="0" rIns="0" bIns="0" rtlCol="0" anchor="ctr"/>
+          <a:lstStyle/>
+          <a:p>
+            <a:pPr indent="0" marL="0">
+              <a:buNone/>
+            </a:pPr>
+            <a:r>
+              <a:rPr lang="en-US" sz="1050" dirty="0">
+                <a:solidFill>
+                  <a:srgbClr val="630031"/>
+                </a:solidFill>
+                <a:latin typeface="Courier New" pitchFamily="34" charset="0"/>
+                <a:ea typeface="Courier New" pitchFamily="34" charset="-122"/>
+                <a:cs typeface="Courier New" pitchFamily="34" charset="-120"/>
+              </a:rPr>
               <a:t>/build/watch-list.html</a:t>
             </a:r>
             <a:endParaRPr lang="en-US" sz="1050" dirty="0"/>
@@ -11255,7 +11363,7 @@
       </p:sp>
       <p:sp>
         <p:nvSpPr>
-          <p:cNvPr id="30" name="Text 28"/>
+          <p:cNvPr id="33" name="Text 31"/>
           <p:cNvSpPr txBox="1"/>
           <p:nvPr/>
         </p:nvSpPr>
